--- a/dist/초1/국어/한글/초1_국어_한글_06_낱말읽고쓰기.pptx
+++ b/dist/초1/국어/한글/초1_국어_한글_06_낱말읽고쓰기.pptx
@@ -118,44 +118,44 @@
   <p:extLst>
     <p:ext uri="{521415D9-36F7-43E2-AB2F-B90AF26B5E84}">
       <p14:sectionLst xmlns:p14="http://schemas.microsoft.com/office/powerpoint/2010/main">
-        <p14:section name="도입" id="{34295ea0-debb-bc4f-bd21-f7e0bdd5237d}">
+        <p14:section name="도입" id="{863c21ac-bf3e-485c-ceca-41bc2955f57a}">
           <p14:sldIdLst>
             <p14:sldId id="256"/>
             <p14:sldId id="257"/>
           </p14:sldIdLst>
         </p14:section>
-        <p14:section name="개념" id="{37063e63-6eab-6a4d-f885-86e2861389eb}">
+        <p14:section name="개념" id="{562c4e5b-be58-6510-0b13-a9fd7c629f53}">
           <p14:sldIdLst>
             <p14:sldId id="258"/>
             <p14:sldId id="261"/>
           </p14:sldIdLst>
         </p14:section>
-        <p14:section name="연습" id="{370a2736-e8f0-3669-dc3b-93573eb987e9}">
+        <p14:section name="연습" id="{7d911144-55a3-33de-01ba-53e5547d8e45}">
           <p14:sldIdLst>
             <p14:sldId id="259"/>
             <p14:sldId id="260"/>
             <p14:sldId id="262"/>
           </p14:sldIdLst>
         </p14:section>
-        <p14:section name="개념" id="{17267e99-50be-4396-29e9-406026674164}">
+        <p14:section name="개념" id="{8f56c5cc-cbf3-f5cd-52a0-d69926306ec7}">
           <p14:sldIdLst/>
         </p14:section>
-        <p14:section name="연습" id="{da309ccd-8ab9-7ba6-91c3-16b78a59019b}">
+        <p14:section name="연습" id="{89434c10-aead-5015-707b-ea695e08689b}">
           <p14:sldIdLst/>
         </p14:section>
-        <p14:section name="확인" id="{f99e0c5f-5d5e-6367-a9a4-75eb63f3436d}">
+        <p14:section name="확인" id="{f812db15-d678-c0e9-a487-e5e75d9d65ad}">
           <p14:sldIdLst>
             <p14:sldId id="263"/>
             <p14:sldId id="264"/>
             <p14:sldId id="265"/>
           </p14:sldIdLst>
         </p14:section>
-        <p14:section name="정리" id="{0500bf9c-8280-372c-ecfb-5883f5e69e85}">
+        <p14:section name="정리" id="{648ada72-8461-5628-9156-1f39acc952c1}">
           <p14:sldIdLst>
             <p14:sldId id="266"/>
           </p14:sldIdLst>
         </p14:section>
-        <p14:section name="보충" id="{43115f6b-5655-74ac-412d-2382d4f66805}">
+        <p14:section name="보충" id="{a37b1204-69cd-d2bc-a7ca-86a0f710c141}">
           <p14:sldIdLst>
             <p14:sldId id="267"/>
           </p14:sldIdLst>
@@ -4819,7 +4819,7 @@
         </p:nvSpPr>
         <p:spPr>
           <a:xfrm>
-            <a:off x="548640" y="2459736"/>
+            <a:off x="548640" y="2734056"/>
             <a:ext cx="566928" cy="566928"/>
           </a:xfrm>
           <a:prstGeom prst="roundRect">
@@ -4866,12 +4866,12 @@
         </p:nvSpPr>
         <p:spPr>
           <a:xfrm>
-            <a:off x="1344168" y="2109216"/>
-            <a:ext cx="1267968" cy="1267968"/>
+            <a:off x="1828800" y="2331720"/>
+            <a:ext cx="1371600" cy="1371600"/>
           </a:xfrm>
           <a:prstGeom prst="roundRect">
             <a:avLst>
-              <a:gd name="adj" fmla="val 10096"/>
+              <a:gd name="adj" fmla="val 9333"/>
             </a:avLst>
           </a:prstGeom>
           <a:solidFill>
@@ -4891,7 +4891,7 @@
               <a:buNone/>
             </a:pPr>
             <a:r>
-              <a:rPr lang="ko-KR" altLang="en-US" sz="5500" b="1" dirty="0">
+              <a:rPr lang="ko-KR" altLang="en-US" sz="5900" b="1" dirty="0">
                 <a:solidFill>
                   <a:srgbClr val="1F2937"/>
                 </a:solidFill>
@@ -4901,7 +4901,7 @@
               </a:rPr>
               <a:t>꼬</a:t>
             </a:r>
-            <a:endParaRPr lang="ko-KR" sz="5500" dirty="0"/>
+            <a:endParaRPr lang="ko-KR" sz="5900" dirty="0"/>
           </a:p>
         </p:txBody>
       </p:sp>
@@ -4913,12 +4913,12 @@
         </p:nvSpPr>
         <p:spPr>
           <a:xfrm>
-            <a:off x="2813304" y="2109216"/>
-            <a:ext cx="1267968" cy="1267968"/>
+            <a:off x="3401568" y="2331720"/>
+            <a:ext cx="1371600" cy="1371600"/>
           </a:xfrm>
           <a:prstGeom prst="roundRect">
             <a:avLst>
-              <a:gd name="adj" fmla="val 10096"/>
+              <a:gd name="adj" fmla="val 9333"/>
             </a:avLst>
           </a:prstGeom>
           <a:solidFill>
@@ -4938,7 +4938,7 @@
               <a:buNone/>
             </a:pPr>
             <a:r>
-              <a:rPr lang="ko-KR" altLang="en-US" sz="5500" b="1" dirty="0">
+              <a:rPr lang="ko-KR" altLang="en-US" sz="5900" b="1" dirty="0">
                 <a:solidFill>
                   <a:srgbClr val="1F2937"/>
                 </a:solidFill>
@@ -4948,7 +4948,7 @@
               </a:rPr>
               <a:t>배</a:t>
             </a:r>
-            <a:endParaRPr lang="ko-KR" sz="5500" dirty="0"/>
+            <a:endParaRPr lang="ko-KR" sz="5900" dirty="0"/>
           </a:p>
         </p:txBody>
       </p:sp>
@@ -4960,12 +4960,12 @@
         </p:nvSpPr>
         <p:spPr>
           <a:xfrm>
-            <a:off x="4282440" y="2109216"/>
-            <a:ext cx="1267968" cy="1267968"/>
+            <a:off x="4974336" y="2331720"/>
+            <a:ext cx="1371600" cy="1371600"/>
           </a:xfrm>
           <a:prstGeom prst="roundRect">
             <a:avLst>
-              <a:gd name="adj" fmla="val 10096"/>
+              <a:gd name="adj" fmla="val 9333"/>
             </a:avLst>
           </a:prstGeom>
           <a:solidFill>
@@ -4985,7 +4985,7 @@
               <a:buNone/>
             </a:pPr>
             <a:r>
-              <a:rPr lang="ko-KR" altLang="en-US" sz="5500" b="1" dirty="0">
+              <a:rPr lang="ko-KR" altLang="en-US" sz="5900" b="1" dirty="0">
                 <a:solidFill>
                   <a:srgbClr val="1F2937"/>
                 </a:solidFill>
@@ -4995,7 +4995,7 @@
               </a:rPr>
               <a:t>과</a:t>
             </a:r>
-            <a:endParaRPr lang="ko-KR" sz="5500" dirty="0"/>
+            <a:endParaRPr lang="ko-KR" sz="5900" dirty="0"/>
           </a:p>
         </p:txBody>
       </p:sp>
@@ -5007,7 +5007,7 @@
         </p:nvSpPr>
         <p:spPr>
           <a:xfrm>
-            <a:off x="548640" y="4654296"/>
+            <a:off x="548640" y="4928616"/>
             <a:ext cx="566928" cy="566928"/>
           </a:xfrm>
           <a:prstGeom prst="roundRect">
@@ -5054,12 +5054,12 @@
         </p:nvSpPr>
         <p:spPr>
           <a:xfrm>
-            <a:off x="1344168" y="4206240"/>
-            <a:ext cx="1965960" cy="1463040"/>
+            <a:off x="1344168" y="4343400"/>
+            <a:ext cx="2606040" cy="1737360"/>
           </a:xfrm>
           <a:prstGeom prst="roundRect">
             <a:avLst>
-              <a:gd name="adj" fmla="val 8750"/>
+              <a:gd name="adj" fmla="val 7368"/>
             </a:avLst>
           </a:prstGeom>
           <a:solidFill>
@@ -5101,12 +5101,12 @@
         </p:nvSpPr>
         <p:spPr>
           <a:xfrm>
-            <a:off x="3584448" y="4206240"/>
-            <a:ext cx="1965960" cy="1463040"/>
+            <a:off x="4224528" y="4343400"/>
+            <a:ext cx="2606040" cy="1737360"/>
           </a:xfrm>
           <a:prstGeom prst="roundRect">
             <a:avLst>
-              <a:gd name="adj" fmla="val 8750"/>
+              <a:gd name="adj" fmla="val 7368"/>
             </a:avLst>
           </a:prstGeom>
           <a:solidFill>
@@ -7344,7 +7344,7 @@
         </p:nvSpPr>
         <p:spPr>
           <a:xfrm>
-            <a:off x="2432304" y="2011680"/>
+            <a:off x="3072384" y="2011680"/>
             <a:ext cx="914400" cy="914400"/>
           </a:xfrm>
           <a:prstGeom prst="roundRect">
@@ -7380,7 +7380,7 @@
         </p:nvSpPr>
         <p:spPr>
           <a:xfrm>
-            <a:off x="3547872" y="2011680"/>
+            <a:off x="4187952" y="2011680"/>
             <a:ext cx="914400" cy="914400"/>
           </a:xfrm>
           <a:prstGeom prst="roundRect">
@@ -7463,7 +7463,7 @@
         </p:nvSpPr>
         <p:spPr>
           <a:xfrm>
-            <a:off x="1874520" y="3108960"/>
+            <a:off x="2514600" y="3108960"/>
             <a:ext cx="914400" cy="914400"/>
           </a:xfrm>
           <a:prstGeom prst="roundRect">
@@ -7499,7 +7499,7 @@
         </p:nvSpPr>
         <p:spPr>
           <a:xfrm>
-            <a:off x="2990088" y="3108960"/>
+            <a:off x="3630168" y="3108960"/>
             <a:ext cx="914400" cy="914400"/>
           </a:xfrm>
           <a:prstGeom prst="roundRect">
@@ -7535,7 +7535,7 @@
         </p:nvSpPr>
         <p:spPr>
           <a:xfrm>
-            <a:off x="4105656" y="3108960"/>
+            <a:off x="4745736" y="3108960"/>
             <a:ext cx="914400" cy="914400"/>
           </a:xfrm>
           <a:prstGeom prst="roundRect">
@@ -7618,7 +7618,7 @@
         </p:nvSpPr>
         <p:spPr>
           <a:xfrm>
-            <a:off x="2432304" y="4206240"/>
+            <a:off x="3072384" y="4206240"/>
             <a:ext cx="914400" cy="914400"/>
           </a:xfrm>
           <a:prstGeom prst="roundRect">
@@ -7654,7 +7654,7 @@
         </p:nvSpPr>
         <p:spPr>
           <a:xfrm>
-            <a:off x="3547872" y="4206240"/>
+            <a:off x="4187952" y="4206240"/>
             <a:ext cx="914400" cy="914400"/>
           </a:xfrm>
           <a:prstGeom prst="roundRect">
@@ -7891,7 +7891,7 @@
         <p:spPr>
           <a:xfrm>
             <a:off x="1344168" y="2011680"/>
-            <a:ext cx="1965960" cy="1280160"/>
+            <a:ext cx="2606040" cy="1280160"/>
           </a:xfrm>
           <a:prstGeom prst="roundRect">
             <a:avLst>
@@ -7937,8 +7937,8 @@
         </p:nvSpPr>
         <p:spPr>
           <a:xfrm>
-            <a:off x="3584448" y="2011680"/>
-            <a:ext cx="1965960" cy="1280160"/>
+            <a:off x="4224528" y="2011680"/>
+            <a:ext cx="2606040" cy="1280160"/>
           </a:xfrm>
           <a:prstGeom prst="roundRect">
             <a:avLst>
@@ -8032,7 +8032,7 @@
         <p:spPr>
           <a:xfrm>
             <a:off x="1344168" y="3474720"/>
-            <a:ext cx="1965960" cy="1280160"/>
+            <a:ext cx="2606040" cy="1280160"/>
           </a:xfrm>
           <a:prstGeom prst="roundRect">
             <a:avLst>
@@ -8078,8 +8078,8 @@
         </p:nvSpPr>
         <p:spPr>
           <a:xfrm>
-            <a:off x="3584448" y="3474720"/>
-            <a:ext cx="1965960" cy="1280160"/>
+            <a:off x="4224528" y="3474720"/>
+            <a:ext cx="2606040" cy="1280160"/>
           </a:xfrm>
           <a:prstGeom prst="roundRect">
             <a:avLst>

--- a/dist/초1/국어/한글/초1_국어_한글_06_낱말읽고쓰기.pptx
+++ b/dist/초1/국어/한글/초1_국어_한글_06_낱말읽고쓰기.pptx
@@ -118,44 +118,44 @@
   <p:extLst>
     <p:ext uri="{521415D9-36F7-43E2-AB2F-B90AF26B5E84}">
       <p14:sectionLst xmlns:p14="http://schemas.microsoft.com/office/powerpoint/2010/main">
-        <p14:section name="도입" id="{863c21ac-bf3e-485c-ceca-41bc2955f57a}">
+        <p14:section name="도입" id="{326946e8-e070-33b2-1253-acf289a56808}">
           <p14:sldIdLst>
             <p14:sldId id="256"/>
             <p14:sldId id="257"/>
           </p14:sldIdLst>
         </p14:section>
-        <p14:section name="개념" id="{562c4e5b-be58-6510-0b13-a9fd7c629f53}">
+        <p14:section name="개념" id="{f1a90531-02f4-991b-d53d-8dcdf80979e9}">
           <p14:sldIdLst>
             <p14:sldId id="258"/>
             <p14:sldId id="261"/>
           </p14:sldIdLst>
         </p14:section>
-        <p14:section name="연습" id="{7d911144-55a3-33de-01ba-53e5547d8e45}">
+        <p14:section name="연습" id="{dd5707da-035f-6e56-ea6a-2f047565be45}">
           <p14:sldIdLst>
             <p14:sldId id="259"/>
             <p14:sldId id="260"/>
             <p14:sldId id="262"/>
           </p14:sldIdLst>
         </p14:section>
-        <p14:section name="개념" id="{8f56c5cc-cbf3-f5cd-52a0-d69926306ec7}">
+        <p14:section name="개념" id="{8cb28b69-0521-cf38-b646-41314d5c97ed}">
           <p14:sldIdLst/>
         </p14:section>
-        <p14:section name="연습" id="{89434c10-aead-5015-707b-ea695e08689b}">
+        <p14:section name="연습" id="{01158cd7-6a7b-56ce-e24f-26494cafe31f}">
           <p14:sldIdLst/>
         </p14:section>
-        <p14:section name="확인" id="{f812db15-d678-c0e9-a487-e5e75d9d65ad}">
+        <p14:section name="확인" id="{02a07414-5c06-2814-8785-509744a80a86}">
           <p14:sldIdLst>
             <p14:sldId id="263"/>
             <p14:sldId id="264"/>
             <p14:sldId id="265"/>
           </p14:sldIdLst>
         </p14:section>
-        <p14:section name="정리" id="{648ada72-8461-5628-9156-1f39acc952c1}">
+        <p14:section name="정리" id="{12e93798-cc80-44f6-dc8f-8e6d91bc3732}">
           <p14:sldIdLst>
             <p14:sldId id="266"/>
           </p14:sldIdLst>
         </p14:section>
-        <p14:section name="보충" id="{a37b1204-69cd-d2bc-a7ca-86a0f710c141}">
+        <p14:section name="보충" id="{c640bff9-9182-3aad-1a24-6f3b3d3e0029}">
           <p14:sldIdLst>
             <p14:sldId id="267"/>
           </p14:sldIdLst>
